--- a/docs/activities/Unit-B-Point-Estimate.pptx
+++ b/docs/activities/Unit-B-Point-Estimate.pptx
@@ -7089,12 +7089,19 @@
                 </a:r>
                 <a14:m>
                   <m:oMath xmlns:m="http://schemas.openxmlformats.org/officeDocument/2006/math">
-                    <m:r>
-                      <m:rPr>
-                        <m:sty m:val="p"/>
-                      </m:rPr>
-                      <m:t>SE</m:t>
-                    </m:r>
+                    <m:acc>
+                      <m:accPr>
+                        <m:chr m:val="̂"/>
+                      </m:accPr>
+                      <m:e>
+                        <m:r>
+                          <m:rPr>
+                            <m:sty m:val="p"/>
+                          </m:rPr>
+                          <m:t>SE</m:t>
+                        </m:r>
+                      </m:e>
+                    </m:acc>
                     <m:d>
                       <m:dPr>
                         <m:begChr m:val="("/>
